--- a/Nuclear_Fuel_Performance/NE533_Spring2026/MOOSE/Part1.pptx
+++ b/Nuclear_Fuel_Performance/NE533_Spring2026/MOOSE/Part1.pptx
@@ -5,8 +5,8 @@
     <p:sldMasterId id="2147483660" r:id="rId1"/>
   </p:sldMasterIdLst>
   <p:sldIdLst>
-    <p:sldId id="546" r:id="rId2"/>
-    <p:sldId id="278" r:id="rId3"/>
+    <p:sldId id="547" r:id="rId2"/>
+    <p:sldId id="548" r:id="rId3"/>
   </p:sldIdLst>
   <p:sldSz cx="12192000" cy="6858000"/>
   <p:notesSz cx="6858000" cy="9144000"/>
@@ -301,7 +301,7 @@
             </a:pPr>
             <a:fld id="{D6F3A803-A045-354B-887A-01433CE46FC2}" type="datetime1">
               <a:rPr lang="en-US" smtClean="0"/>
-              <a:t>2/26/25</a:t>
+              <a:t>2/11/26</a:t>
             </a:fld>
             <a:endParaRPr lang="en-US"/>
           </a:p>
@@ -494,7 +494,7 @@
             </a:pPr>
             <a:fld id="{A8B33C1D-C2E2-1049-AA3F-CD6E91052752}" type="datetime1">
               <a:rPr lang="en-US" smtClean="0"/>
-              <a:t>2/26/25</a:t>
+              <a:t>2/11/26</a:t>
             </a:fld>
             <a:endParaRPr lang="en-US"/>
           </a:p>
@@ -696,7 +696,7 @@
             </a:pPr>
             <a:fld id="{2791AD68-B60C-4542-BDDD-2074DE6DE828}" type="datetime1">
               <a:rPr lang="en-US" smtClean="0"/>
-              <a:t>2/26/25</a:t>
+              <a:t>2/11/26</a:t>
             </a:fld>
             <a:endParaRPr lang="en-US"/>
           </a:p>
@@ -895,7 +895,7 @@
             </a:pPr>
             <a:fld id="{C5BD04BF-9DC2-6341-92B2-BD109A2EF3B1}" type="datetime1">
               <a:rPr lang="en-US" smtClean="0"/>
-              <a:t>2/26/25</a:t>
+              <a:t>2/11/26</a:t>
             </a:fld>
             <a:endParaRPr lang="en-US"/>
           </a:p>
@@ -1165,7 +1165,7 @@
             </a:pPr>
             <a:fld id="{FB0FFBC7-3028-644D-986B-D9855CB74B38}" type="datetime1">
               <a:rPr lang="en-US" smtClean="0"/>
-              <a:t>2/26/25</a:t>
+              <a:t>2/11/26</a:t>
             </a:fld>
             <a:endParaRPr lang="en-US"/>
           </a:p>
@@ -1476,7 +1476,7 @@
             </a:pPr>
             <a:fld id="{2C3B8AE4-01F5-CC42-9C62-61BC6528368B}" type="datetime1">
               <a:rPr lang="en-US" smtClean="0"/>
-              <a:t>2/26/25</a:t>
+              <a:t>2/11/26</a:t>
             </a:fld>
             <a:endParaRPr lang="en-US"/>
           </a:p>
@@ -1919,7 +1919,7 @@
             </a:pPr>
             <a:fld id="{77E49314-4A78-2444-9569-44EB70168344}" type="datetime1">
               <a:rPr lang="en-US" smtClean="0"/>
-              <a:t>2/26/25</a:t>
+              <a:t>2/11/26</a:t>
             </a:fld>
             <a:endParaRPr lang="en-US"/>
           </a:p>
@@ -2060,7 +2060,7 @@
             </a:pPr>
             <a:fld id="{5BC22837-4683-B242-B000-BCEE30621787}" type="datetime1">
               <a:rPr lang="en-US" smtClean="0"/>
-              <a:t>2/26/25</a:t>
+              <a:t>2/11/26</a:t>
             </a:fld>
             <a:endParaRPr lang="en-US"/>
           </a:p>
@@ -2179,7 +2179,7 @@
             </a:pPr>
             <a:fld id="{DCDAE926-7EF1-0B40-B57E-417D188A609C}" type="datetime1">
               <a:rPr lang="en-US" smtClean="0"/>
-              <a:t>2/26/25</a:t>
+              <a:t>2/11/26</a:t>
             </a:fld>
             <a:endParaRPr lang="en-US"/>
           </a:p>
@@ -2478,7 +2478,7 @@
             </a:pPr>
             <a:fld id="{518D107B-B9C7-5B41-A168-55258AB95F52}" type="datetime1">
               <a:rPr lang="en-US" smtClean="0"/>
-              <a:t>2/26/25</a:t>
+              <a:t>2/11/26</a:t>
             </a:fld>
             <a:endParaRPr lang="en-US"/>
           </a:p>
@@ -2762,7 +2762,7 @@
             </a:pPr>
             <a:fld id="{3AD92D36-EE82-3142-B011-9831FB5E702F}" type="datetime1">
               <a:rPr lang="en-US" smtClean="0"/>
-              <a:t>2/26/25</a:t>
+              <a:t>2/11/26</a:t>
             </a:fld>
             <a:endParaRPr lang="en-US"/>
           </a:p>
@@ -3067,7 +3067,7 @@
             </a:pPr>
             <a:fld id="{3EE08B4B-7256-494F-A90D-3891BD685F4A}" type="datetime1">
               <a:rPr lang="en-US" smtClean="0"/>
-              <a:t>2/26/25</a:t>
+              <a:t>2/11/26</a:t>
             </a:fld>
             <a:endParaRPr lang="en-US" dirty="0"/>
           </a:p>
@@ -3658,6 +3658,7 @@
           <a:bodyPr/>
           <a:lstStyle/>
           <a:p>
+            <a:pPr algn="l"/>
             <a:r>
               <a:rPr lang="en-US" dirty="0"/>
               <a:t>MOOSE Project</a:t>
@@ -3700,7 +3701,7 @@
           <a:p>
             <a:r>
               <a:rPr lang="en-US" dirty="0"/>
-              <a:t>Will upload a written report, max of 10 pages (including figures)</a:t>
+              <a:t>Will upload a written Part 1 report, max of 10 pages (including figures)</a:t>
             </a:r>
           </a:p>
           <a:p>
@@ -3718,7 +3719,7 @@
           <a:p>
             <a:r>
               <a:rPr lang="en-US" dirty="0"/>
-              <a:t>Part 1 is due Feb. 28</a:t>
+              <a:t>Part 1 is due March 3</a:t>
             </a:r>
           </a:p>
           <a:p>
@@ -3822,7 +3823,7 @@
     </p:spTree>
     <p:extLst>
       <p:ext uri="{BB962C8B-B14F-4D97-AF65-F5344CB8AC3E}">
-        <p14:creationId xmlns:p14="http://schemas.microsoft.com/office/powerpoint/2010/main" val="4079713112"/>
+        <p14:creationId xmlns:p14="http://schemas.microsoft.com/office/powerpoint/2010/main" val="3902655774"/>
       </p:ext>
     </p:extLst>
   </p:cSld>
@@ -4380,7 +4381,7 @@
         <p:spPr>
           <a:xfrm>
             <a:off x="667872" y="1968501"/>
-            <a:ext cx="5297247" cy="3970318"/>
+            <a:ext cx="5297247" cy="4247317"/>
           </a:xfrm>
           <a:prstGeom prst="rect">
             <a:avLst/>
@@ -4533,7 +4534,7 @@
                 <a:ea typeface="+mn-ea"/>
                 <a:cs typeface="+mn-cs"/>
               </a:rPr>
-              <a:t>Outer cladding temperature is constant: 550 K</a:t>
+              <a:t>Outer cladding temperature is constant: 600 K</a:t>
             </a:r>
           </a:p>
           <a:p>
@@ -4605,7 +4606,7 @@
                 <a:ea typeface="+mn-ea"/>
                 <a:cs typeface="+mn-cs"/>
               </a:rPr>
-              <a:t>Steady-state: LHR = 350 W/cm</a:t>
+              <a:t>Steady-state: Q = 350 W/cm^3</a:t>
             </a:r>
             <a:endParaRPr kumimoji="0" lang="en-US" sz="1800" b="0" i="0" u="none" strike="noStrike" kern="1200" cap="none" spc="0" normalizeH="0" baseline="30000" noProof="0" dirty="0">
               <a:ln>
@@ -4691,115 +4692,7 @@
                 <a:ea typeface="+mn-ea"/>
                 <a:cs typeface="+mn-cs"/>
               </a:rPr>
-              <a:t>Solve for centerline temperature vs time</a:t>
-            </a:r>
-          </a:p>
-          <a:p>
-            <a:pPr marL="742950" marR="0" lvl="1" indent="-285750" algn="l" defTabSz="914400" rtl="0" eaLnBrk="1" fontAlgn="auto" latinLnBrk="0" hangingPunct="1">
-              <a:lnSpc>
-                <a:spcPct val="100000"/>
-              </a:lnSpc>
-              <a:spcBef>
-                <a:spcPts val="0"/>
-              </a:spcBef>
-              <a:spcAft>
-                <a:spcPts val="0"/>
-              </a:spcAft>
-              <a:buClrTx/>
-              <a:buSzTx/>
-              <a:buFont typeface="Arial" panose="020B0604020202020204" pitchFamily="34" charset="0"/>
-              <a:buChar char="•"/>
-              <a:tabLst/>
-              <a:defRPr/>
-            </a:pPr>
-            <a:r>
-              <a:rPr kumimoji="0" lang="en-US" sz="1800" b="0" i="0" u="none" strike="noStrike" kern="1200" cap="none" spc="0" normalizeH="0" baseline="0" noProof="0" dirty="0">
-                <a:ln>
-                  <a:noFill/>
-                </a:ln>
-                <a:solidFill>
-                  <a:prstClr val="black"/>
-                </a:solidFill>
-                <a:effectLst/>
-                <a:uLnTx/>
-                <a:uFillTx/>
-                <a:latin typeface="Calibri"/>
-                <a:ea typeface="+mn-ea"/>
-                <a:cs typeface="+mn-cs"/>
-              </a:rPr>
-              <a:t>Transient: LHR = 350*EXP(-((t-20)^2)/2)+350</a:t>
-            </a:r>
-          </a:p>
-          <a:p>
-            <a:pPr marL="742950" marR="0" lvl="1" indent="-285750" algn="l" defTabSz="914400" rtl="0" eaLnBrk="1" fontAlgn="auto" latinLnBrk="0" hangingPunct="1">
-              <a:lnSpc>
-                <a:spcPct val="100000"/>
-              </a:lnSpc>
-              <a:spcBef>
-                <a:spcPts val="0"/>
-              </a:spcBef>
-              <a:spcAft>
-                <a:spcPts val="0"/>
-              </a:spcAft>
-              <a:buClrTx/>
-              <a:buSzTx/>
-              <a:buFont typeface="Arial" panose="020B0604020202020204" pitchFamily="34" charset="0"/>
-              <a:buChar char="•"/>
-              <a:tabLst/>
-              <a:defRPr/>
-            </a:pPr>
-            <a:r>
-              <a:rPr kumimoji="0" lang="en-US" sz="1800" b="0" i="0" u="none" strike="noStrike" kern="1200" cap="none" spc="0" normalizeH="0" baseline="0" noProof="0" dirty="0">
-                <a:ln>
-                  <a:noFill/>
-                </a:ln>
-                <a:solidFill>
-                  <a:prstClr val="black"/>
-                </a:solidFill>
-                <a:effectLst/>
-                <a:uLnTx/>
-                <a:uFillTx/>
-                <a:latin typeface="Calibri"/>
-                <a:ea typeface="+mn-ea"/>
-                <a:cs typeface="+mn-cs"/>
-              </a:rPr>
-              <a:t>for up to t=100</a:t>
-            </a:r>
-          </a:p>
-          <a:p>
-            <a:pPr marL="742950" marR="0" lvl="1" indent="-285750" algn="l" defTabSz="914400" rtl="0" eaLnBrk="1" fontAlgn="auto" latinLnBrk="0" hangingPunct="1">
-              <a:lnSpc>
-                <a:spcPct val="100000"/>
-              </a:lnSpc>
-              <a:spcBef>
-                <a:spcPts val="0"/>
-              </a:spcBef>
-              <a:spcAft>
-                <a:spcPts val="0"/>
-              </a:spcAft>
-              <a:buClrTx/>
-              <a:buSzTx/>
-              <a:buFont typeface="Arial" panose="020B0604020202020204" pitchFamily="34" charset="0"/>
-              <a:buChar char="•"/>
-              <a:tabLst/>
-              <a:defRPr/>
-            </a:pPr>
-            <a:r>
-              <a:rPr kumimoji="0" lang="en-US" sz="1800" b="0" i="0" u="none" strike="noStrike" kern="1200" cap="none" spc="0" normalizeH="0" baseline="0" noProof="0" dirty="0">
-                <a:ln>
-                  <a:noFill/>
-                </a:ln>
-                <a:solidFill>
-                  <a:prstClr val="black"/>
-                </a:solidFill>
-                <a:effectLst/>
-                <a:uLnTx/>
-                <a:uFillTx/>
-                <a:latin typeface="Calibri"/>
-                <a:ea typeface="+mn-ea"/>
-                <a:cs typeface="+mn-cs"/>
-              </a:rPr>
-              <a:t>Get peak T value</a:t>
+              <a:t>Use both a constant k and a temperature-dependent k</a:t>
             </a:r>
           </a:p>
           <a:p>
@@ -4821,6 +4714,34 @@
               <a:defRPr/>
             </a:pPr>
             <a:r>
+              <a:rPr lang="en-US" dirty="0">
+                <a:solidFill>
+                  <a:prstClr val="black"/>
+                </a:solidFill>
+                <a:latin typeface="Calibri"/>
+              </a:rPr>
+              <a:t>Perform a mesh convergence study</a:t>
+            </a:r>
+          </a:p>
+          <a:p>
+            <a:pPr marL="285750" marR="0" lvl="0" indent="-285750" algn="l" defTabSz="914400" rtl="0" eaLnBrk="1" fontAlgn="auto" latinLnBrk="0" hangingPunct="1">
+              <a:lnSpc>
+                <a:spcPct val="100000"/>
+              </a:lnSpc>
+              <a:spcBef>
+                <a:spcPts val="0"/>
+              </a:spcBef>
+              <a:spcAft>
+                <a:spcPts val="0"/>
+              </a:spcAft>
+              <a:buClrTx/>
+              <a:buSzTx/>
+              <a:buFont typeface="Arial" panose="020B0604020202020204" pitchFamily="34" charset="0"/>
+              <a:buChar char="•"/>
+              <a:tabLst/>
+              <a:defRPr/>
+            </a:pPr>
+            <a:r>
               <a:rPr kumimoji="0" lang="en-US" sz="1800" b="0" i="0" u="none" strike="noStrike" kern="1200" cap="none" spc="0" normalizeH="0" baseline="0" noProof="0" dirty="0">
                 <a:ln>
                   <a:noFill/>
@@ -4835,7 +4756,83 @@
                 <a:ea typeface="+mn-ea"/>
                 <a:cs typeface="+mn-cs"/>
               </a:rPr>
-              <a:t>Use both a constant k and a temperature-dependent k</a:t>
+              <a:t>Use transient solver</a:t>
+            </a:r>
+          </a:p>
+          <a:p>
+            <a:pPr marL="285750" marR="0" lvl="0" indent="-285750" algn="l" defTabSz="914400" rtl="0" eaLnBrk="1" fontAlgn="auto" latinLnBrk="0" hangingPunct="1">
+              <a:lnSpc>
+                <a:spcPct val="100000"/>
+              </a:lnSpc>
+              <a:spcBef>
+                <a:spcPts val="0"/>
+              </a:spcBef>
+              <a:spcAft>
+                <a:spcPts val="0"/>
+              </a:spcAft>
+              <a:buClrTx/>
+              <a:buSzTx/>
+              <a:buFont typeface="Arial" panose="020B0604020202020204" pitchFamily="34" charset="0"/>
+              <a:buChar char="•"/>
+              <a:tabLst/>
+              <a:defRPr/>
+            </a:pPr>
+            <a:r>
+              <a:rPr kumimoji="0" lang="en-US" sz="1800" b="0" i="0" u="none" strike="noStrike" kern="1200" cap="none" spc="0" normalizeH="0" baseline="0" noProof="0" dirty="0">
+                <a:ln>
+                  <a:noFill/>
+                </a:ln>
+                <a:solidFill>
+                  <a:prstClr val="black"/>
+                </a:solidFill>
+                <a:effectLst/>
+                <a:uLnTx/>
+                <a:uFillTx/>
+                <a:latin typeface="Calibri"/>
+                <a:ea typeface="+mn-ea"/>
+                <a:cs typeface="+mn-cs"/>
+              </a:rPr>
+              <a:t>Explore two mesh options:</a:t>
+            </a:r>
+          </a:p>
+          <a:p>
+            <a:pPr marL="742950" lvl="1" indent="-285750">
+              <a:buFont typeface="Arial" panose="020B0604020202020204" pitchFamily="34" charset="0"/>
+              <a:buChar char="•"/>
+              <a:defRPr/>
+            </a:pPr>
+            <a:r>
+              <a:rPr lang="en-US" dirty="0">
+                <a:solidFill>
+                  <a:prstClr val="black"/>
+                </a:solidFill>
+                <a:latin typeface="Calibri"/>
+              </a:rPr>
+              <a:t>explicitly meshing the gap</a:t>
+            </a:r>
+          </a:p>
+          <a:p>
+            <a:pPr marL="742950" lvl="1" indent="-285750">
+              <a:buFont typeface="Arial" panose="020B0604020202020204" pitchFamily="34" charset="0"/>
+              <a:buChar char="•"/>
+              <a:defRPr/>
+            </a:pPr>
+            <a:r>
+              <a:rPr kumimoji="0" lang="en-US" b="0" i="0" u="none" strike="noStrike" kern="1200" cap="none" spc="0" normalizeH="0" baseline="0" noProof="0" dirty="0">
+                <a:ln>
+                  <a:noFill/>
+                </a:ln>
+                <a:solidFill>
+                  <a:prstClr val="black"/>
+                </a:solidFill>
+                <a:effectLst/>
+                <a:uLnTx/>
+                <a:uFillTx/>
+                <a:latin typeface="Calibri"/>
+                <a:ea typeface="+mn-ea"/>
+                <a:cs typeface="+mn-cs"/>
+              </a:rPr>
+              <a:t>without meshing the gap</a:t>
             </a:r>
           </a:p>
         </p:txBody>
@@ -5298,7 +5295,7 @@
     </p:spTree>
     <p:extLst>
       <p:ext uri="{BB962C8B-B14F-4D97-AF65-F5344CB8AC3E}">
-        <p14:creationId xmlns:p14="http://schemas.microsoft.com/office/powerpoint/2010/main" val="2517924237"/>
+        <p14:creationId xmlns:p14="http://schemas.microsoft.com/office/powerpoint/2010/main" val="2679805813"/>
       </p:ext>
     </p:extLst>
   </p:cSld>
